--- a/DATAQUEST_3_0_DQBH.pptx
+++ b/DATAQUEST_3_0_DQBH.pptx
@@ -4539,13 +4539,22 @@
               </a:defRPr>
             </a:pPr>
             <a:r>
+              <a:rPr lang="en-US" sz="1600" b="1">
+                <a:solidFill>
+                  <a:srgbClr val="FD1485"/>
+                </a:solidFill>
+                <a:latin typeface="Fjalla One"/>
+              </a:rPr>
+              <a:t>MIRTOS-Maintenance </a:t>
+            </a:r>
+            <a:r>
               <a:rPr lang="en-US" sz="1600" b="1" dirty="0">
                 <a:solidFill>
                   <a:srgbClr val="FD1485"/>
                 </a:solidFill>
                 <a:latin typeface="Fjalla One"/>
               </a:rPr>
-              <a:t>MIARTOS-Maintenance Intelligence And Resilient Task Orchestration System</a:t>
+              <a:t>Intelligence And Resilient Task Orchestration System</a:t>
             </a:r>
           </a:p>
           <a:p>
